--- a/docs/thesis/114_楊宏傑_TCSE.pptx
+++ b/docs/thesis/114_楊宏傑_TCSE.pptx
@@ -146,7 +146,7 @@
 <file path=ppt/revisionInfo.xml><?xml version="1.0" encoding="utf-8"?>
 <p1510:revInfo xmlns:a="http://schemas.openxmlformats.org/drawingml/2006/main" xmlns:r="http://schemas.openxmlformats.org/officeDocument/2006/relationships" xmlns:p1510="http://schemas.microsoft.com/office/powerpoint/2015/10/main">
   <p1510:revLst>
-    <p1510:client id="{490B6F5F-84A0-4D5F-8811-8B31624AA5AE}" v="265" dt="2026-07-01T12:47:46.807"/>
+    <p1510:client id="{490B6F5F-84A0-4D5F-8811-8B31624AA5AE}" v="4" dt="2026-07-03T02:53:13.323"/>
   </p1510:revLst>
 </p1510:revInfo>
 </file>
@@ -156,7 +156,7 @@
   <pc:docChgLst>
     <pc:chgData name="宏傑 楊" userId="ee57404c450d34c3" providerId="LiveId" clId="{C566A467-C6D7-4AF8-8C72-E0B89F2E9DDD}"/>
     <pc:docChg chg="undo redo custSel addSld delSld modSld sldOrd">
-      <pc:chgData name="宏傑 楊" userId="ee57404c450d34c3" providerId="LiveId" clId="{C566A467-C6D7-4AF8-8C72-E0B89F2E9DDD}" dt="2026-07-02T05:20:59.973" v="3454" actId="20577"/>
+      <pc:chgData name="宏傑 楊" userId="ee57404c450d34c3" providerId="LiveId" clId="{C566A467-C6D7-4AF8-8C72-E0B89F2E9DDD}" dt="2026-07-03T02:54:25.334" v="3515" actId="20577"/>
       <pc:docMkLst>
         <pc:docMk/>
       </pc:docMkLst>
@@ -236,7 +236,7 @@
         </pc:spChg>
       </pc:sldChg>
       <pc:sldChg chg="modNotesTx">
-        <pc:chgData name="宏傑 楊" userId="ee57404c450d34c3" providerId="LiveId" clId="{C566A467-C6D7-4AF8-8C72-E0B89F2E9DDD}" dt="2026-07-01T07:29:42.463" v="2689" actId="20577"/>
+        <pc:chgData name="宏傑 楊" userId="ee57404c450d34c3" providerId="LiveId" clId="{C566A467-C6D7-4AF8-8C72-E0B89F2E9DDD}" dt="2026-07-03T02:49:28.881" v="3471" actId="20577"/>
         <pc:sldMkLst>
           <pc:docMk/>
           <pc:sldMk cId="345824661" sldId="322"/>
@@ -247,55 +247,6 @@
         <pc:sldMkLst>
           <pc:docMk/>
           <pc:sldMk cId="1112248558" sldId="323"/>
-        </pc:sldMkLst>
-      </pc:sldChg>
-      <pc:sldChg chg="del mod modShow">
-        <pc:chgData name="宏傑 楊" userId="ee57404c450d34c3" providerId="LiveId" clId="{C566A467-C6D7-4AF8-8C72-E0B89F2E9DDD}" dt="2026-07-01T07:59:04.204" v="2979" actId="47"/>
-        <pc:sldMkLst>
-          <pc:docMk/>
-          <pc:sldMk cId="974462287" sldId="378"/>
-        </pc:sldMkLst>
-      </pc:sldChg>
-      <pc:sldChg chg="del mod modShow">
-        <pc:chgData name="宏傑 楊" userId="ee57404c450d34c3" providerId="LiveId" clId="{C566A467-C6D7-4AF8-8C72-E0B89F2E9DDD}" dt="2026-07-01T07:59:04.204" v="2979" actId="47"/>
-        <pc:sldMkLst>
-          <pc:docMk/>
-          <pc:sldMk cId="3642292789" sldId="379"/>
-        </pc:sldMkLst>
-      </pc:sldChg>
-      <pc:sldChg chg="del mod modShow">
-        <pc:chgData name="宏傑 楊" userId="ee57404c450d34c3" providerId="LiveId" clId="{C566A467-C6D7-4AF8-8C72-E0B89F2E9DDD}" dt="2026-07-01T07:59:04.204" v="2979" actId="47"/>
-        <pc:sldMkLst>
-          <pc:docMk/>
-          <pc:sldMk cId="2372795379" sldId="380"/>
-        </pc:sldMkLst>
-      </pc:sldChg>
-      <pc:sldChg chg="del mod modShow">
-        <pc:chgData name="宏傑 楊" userId="ee57404c450d34c3" providerId="LiveId" clId="{C566A467-C6D7-4AF8-8C72-E0B89F2E9DDD}" dt="2026-07-01T07:59:04.204" v="2979" actId="47"/>
-        <pc:sldMkLst>
-          <pc:docMk/>
-          <pc:sldMk cId="2868231438" sldId="381"/>
-        </pc:sldMkLst>
-      </pc:sldChg>
-      <pc:sldChg chg="del mod modShow">
-        <pc:chgData name="宏傑 楊" userId="ee57404c450d34c3" providerId="LiveId" clId="{C566A467-C6D7-4AF8-8C72-E0B89F2E9DDD}" dt="2026-07-01T07:59:04.204" v="2979" actId="47"/>
-        <pc:sldMkLst>
-          <pc:docMk/>
-          <pc:sldMk cId="787708442" sldId="382"/>
-        </pc:sldMkLst>
-      </pc:sldChg>
-      <pc:sldChg chg="del mod modShow">
-        <pc:chgData name="宏傑 楊" userId="ee57404c450d34c3" providerId="LiveId" clId="{C566A467-C6D7-4AF8-8C72-E0B89F2E9DDD}" dt="2026-07-01T07:59:04.204" v="2979" actId="47"/>
-        <pc:sldMkLst>
-          <pc:docMk/>
-          <pc:sldMk cId="3690998362" sldId="383"/>
-        </pc:sldMkLst>
-      </pc:sldChg>
-      <pc:sldChg chg="del mod ord modShow">
-        <pc:chgData name="宏傑 楊" userId="ee57404c450d34c3" providerId="LiveId" clId="{C566A467-C6D7-4AF8-8C72-E0B89F2E9DDD}" dt="2026-07-01T07:59:04.204" v="2979" actId="47"/>
-        <pc:sldMkLst>
-          <pc:docMk/>
-          <pc:sldMk cId="1137932624" sldId="386"/>
         </pc:sldMkLst>
       </pc:sldChg>
       <pc:sldChg chg="addSp delSp modSp mod ord modNotesTx">
@@ -320,14 +271,6 @@
             <ac:spMk id="3" creationId="{6523EA98-4841-AB80-5022-30741AC4A77C}"/>
           </ac:spMkLst>
         </pc:spChg>
-        <pc:spChg chg="add del mod">
-          <ac:chgData name="宏傑 楊" userId="ee57404c450d34c3" providerId="LiveId" clId="{C566A467-C6D7-4AF8-8C72-E0B89F2E9DDD}" dt="2026-07-01T07:35:03.496" v="2782" actId="478"/>
-          <ac:spMkLst>
-            <pc:docMk/>
-            <pc:sldMk cId="3190044667" sldId="387"/>
-            <ac:spMk id="6" creationId="{10A617ED-4BDB-6875-663B-D05819DB7334}"/>
-          </ac:spMkLst>
-        </pc:spChg>
       </pc:sldChg>
       <pc:sldChg chg="modSp mod">
         <pc:chgData name="宏傑 楊" userId="ee57404c450d34c3" providerId="LiveId" clId="{C566A467-C6D7-4AF8-8C72-E0B89F2E9DDD}" dt="2026-07-01T07:34:19.717" v="2760" actId="20577"/>
@@ -343,6 +286,13 @@
             <ac:spMk id="3" creationId="{68F62BB8-5859-7DA0-8954-D1FD69C97740}"/>
           </ac:spMkLst>
         </pc:spChg>
+      </pc:sldChg>
+      <pc:sldChg chg="modNotesTx">
+        <pc:chgData name="宏傑 楊" userId="ee57404c450d34c3" providerId="LiveId" clId="{C566A467-C6D7-4AF8-8C72-E0B89F2E9DDD}" dt="2026-07-03T02:54:25.334" v="3515" actId="20577"/>
+        <pc:sldMkLst>
+          <pc:docMk/>
+          <pc:sldMk cId="383841343" sldId="392"/>
+        </pc:sldMkLst>
       </pc:sldChg>
       <pc:sldChg chg="modNotesTx">
         <pc:chgData name="宏傑 楊" userId="ee57404c450d34c3" providerId="LiveId" clId="{C566A467-C6D7-4AF8-8C72-E0B89F2E9DDD}" dt="2026-07-02T05:20:59.973" v="3454" actId="20577"/>
@@ -373,27 +323,6 @@
           </ac:spMkLst>
         </pc:spChg>
       </pc:sldChg>
-      <pc:sldChg chg="del mod modShow modNotesTx">
-        <pc:chgData name="宏傑 楊" userId="ee57404c450d34c3" providerId="LiveId" clId="{C566A467-C6D7-4AF8-8C72-E0B89F2E9DDD}" dt="2026-07-01T07:59:04.204" v="2979" actId="47"/>
-        <pc:sldMkLst>
-          <pc:docMk/>
-          <pc:sldMk cId="1094491993" sldId="396"/>
-        </pc:sldMkLst>
-      </pc:sldChg>
-      <pc:sldChg chg="del mod modShow">
-        <pc:chgData name="宏傑 楊" userId="ee57404c450d34c3" providerId="LiveId" clId="{C566A467-C6D7-4AF8-8C72-E0B89F2E9DDD}" dt="2026-07-01T07:59:04.204" v="2979" actId="47"/>
-        <pc:sldMkLst>
-          <pc:docMk/>
-          <pc:sldMk cId="4033315892" sldId="397"/>
-        </pc:sldMkLst>
-      </pc:sldChg>
-      <pc:sldChg chg="del">
-        <pc:chgData name="宏傑 楊" userId="ee57404c450d34c3" providerId="LiveId" clId="{C566A467-C6D7-4AF8-8C72-E0B89F2E9DDD}" dt="2026-07-01T07:21:39.122" v="2645" actId="47"/>
-        <pc:sldMkLst>
-          <pc:docMk/>
-          <pc:sldMk cId="2549376528" sldId="400"/>
-        </pc:sldMkLst>
-      </pc:sldChg>
       <pc:sldChg chg="modSp mod ord modNotesTx">
         <pc:chgData name="宏傑 楊" userId="ee57404c450d34c3" providerId="LiveId" clId="{C566A467-C6D7-4AF8-8C72-E0B89F2E9DDD}" dt="2026-07-01T12:43:56.633" v="3321" actId="20577"/>
         <pc:sldMkLst>
@@ -406,21 +335,6 @@
             <pc:docMk/>
             <pc:sldMk cId="2165522226" sldId="401"/>
             <ac:spMk id="3" creationId="{DD3524AB-C7F0-330E-01E5-DC326524A3FC}"/>
-          </ac:spMkLst>
-        </pc:spChg>
-      </pc:sldChg>
-      <pc:sldChg chg="modSp del mod modShow modNotesTx">
-        <pc:chgData name="宏傑 楊" userId="ee57404c450d34c3" providerId="LiveId" clId="{C566A467-C6D7-4AF8-8C72-E0B89F2E9DDD}" dt="2026-07-01T07:59:04.204" v="2979" actId="47"/>
-        <pc:sldMkLst>
-          <pc:docMk/>
-          <pc:sldMk cId="2422543165" sldId="402"/>
-        </pc:sldMkLst>
-        <pc:spChg chg="mod">
-          <ac:chgData name="宏傑 楊" userId="ee57404c450d34c3" providerId="LiveId" clId="{C566A467-C6D7-4AF8-8C72-E0B89F2E9DDD}" dt="2026-07-01T07:21:23.158" v="2637" actId="12"/>
-          <ac:spMkLst>
-            <pc:docMk/>
-            <pc:sldMk cId="2422543165" sldId="402"/>
-            <ac:spMk id="10" creationId="{338F5130-24B6-BC8D-93DB-13AC61292434}"/>
           </ac:spMkLst>
         </pc:spChg>
       </pc:sldChg>
@@ -515,13 +429,6 @@
           </ac:graphicFrameMkLst>
         </pc:graphicFrameChg>
       </pc:sldChg>
-      <pc:sldChg chg="modSp del mod modShow modNotesTx">
-        <pc:chgData name="宏傑 楊" userId="ee57404c450d34c3" providerId="LiveId" clId="{C566A467-C6D7-4AF8-8C72-E0B89F2E9DDD}" dt="2026-07-01T07:59:04.204" v="2979" actId="47"/>
-        <pc:sldMkLst>
-          <pc:docMk/>
-          <pc:sldMk cId="4137629986" sldId="433"/>
-        </pc:sldMkLst>
-      </pc:sldChg>
       <pc:sldChg chg="modSp mod ord modNotesTx">
         <pc:chgData name="宏傑 楊" userId="ee57404c450d34c3" providerId="LiveId" clId="{C566A467-C6D7-4AF8-8C72-E0B89F2E9DDD}" dt="2026-07-01T12:46:54.414" v="3400" actId="20577"/>
         <pc:sldMkLst>
@@ -538,7 +445,7 @@
         </pc:spChg>
       </pc:sldChg>
       <pc:sldChg chg="addSp modSp add mod modNotesTx">
-        <pc:chgData name="宏傑 楊" userId="ee57404c450d34c3" providerId="LiveId" clId="{C566A467-C6D7-4AF8-8C72-E0B89F2E9DDD}" dt="2026-07-01T07:15:35.364" v="2627" actId="1076"/>
+        <pc:chgData name="宏傑 楊" userId="ee57404c450d34c3" providerId="LiveId" clId="{C566A467-C6D7-4AF8-8C72-E0B89F2E9DDD}" dt="2026-07-03T02:53:48.811" v="3481" actId="20577"/>
         <pc:sldMkLst>
           <pc:docMk/>
           <pc:sldMk cId="3670357817" sldId="439"/>
@@ -599,33 +506,17 @@
         </pc:spChg>
       </pc:sldChg>
       <pc:sldChg chg="addSp delSp modSp add mod ord modNotesTx">
-        <pc:chgData name="宏傑 楊" userId="ee57404c450d34c3" providerId="LiveId" clId="{C566A467-C6D7-4AF8-8C72-E0B89F2E9DDD}" dt="2026-07-01T12:38:24.932" v="3252" actId="6549"/>
+        <pc:chgData name="宏傑 楊" userId="ee57404c450d34c3" providerId="LiveId" clId="{C566A467-C6D7-4AF8-8C72-E0B89F2E9DDD}" dt="2026-07-03T02:47:32.180" v="3468" actId="6549"/>
         <pc:sldMkLst>
           <pc:docMk/>
           <pc:sldMk cId="212611194" sldId="442"/>
         </pc:sldMkLst>
-        <pc:spChg chg="del mod">
-          <ac:chgData name="宏傑 楊" userId="ee57404c450d34c3" providerId="LiveId" clId="{C566A467-C6D7-4AF8-8C72-E0B89F2E9DDD}" dt="2026-07-01T08:47:27.636" v="3184" actId="478"/>
-          <ac:spMkLst>
-            <pc:docMk/>
-            <pc:sldMk cId="212611194" sldId="442"/>
-            <ac:spMk id="2" creationId="{5E90F169-FC75-E622-DE03-01FE40FC1E68}"/>
-          </ac:spMkLst>
-        </pc:spChg>
         <pc:spChg chg="mod">
           <ac:chgData name="宏傑 楊" userId="ee57404c450d34c3" providerId="LiveId" clId="{C566A467-C6D7-4AF8-8C72-E0B89F2E9DDD}" dt="2026-07-01T07:32:52.981" v="2719"/>
           <ac:spMkLst>
             <pc:docMk/>
             <pc:sldMk cId="212611194" sldId="442"/>
             <ac:spMk id="3" creationId="{E0E515BD-4380-412E-93D5-306AFEB84B1D}"/>
-          </ac:spMkLst>
-        </pc:spChg>
-        <pc:spChg chg="del mod">
-          <ac:chgData name="宏傑 楊" userId="ee57404c450d34c3" providerId="LiveId" clId="{C566A467-C6D7-4AF8-8C72-E0B89F2E9DDD}" dt="2026-07-01T07:33:05.178" v="2721" actId="478"/>
-          <ac:spMkLst>
-            <pc:docMk/>
-            <pc:sldMk cId="212611194" sldId="442"/>
-            <ac:spMk id="6" creationId="{18753FD1-848C-FBA3-D01D-2D696B6524A9}"/>
           </ac:spMkLst>
         </pc:spChg>
         <pc:spChg chg="add">
@@ -644,21 +535,6 @@
             <ac:spMk id="9" creationId="{D048981F-C6CB-2204-1442-1C771F15638B}"/>
           </ac:spMkLst>
         </pc:spChg>
-        <pc:spChg chg="add mod">
-          <ac:chgData name="宏傑 楊" userId="ee57404c450d34c3" providerId="LiveId" clId="{C566A467-C6D7-4AF8-8C72-E0B89F2E9DDD}" dt="2026-07-01T08:47:29.464" v="3186"/>
-          <ac:spMkLst>
-            <pc:docMk/>
-            <pc:sldMk cId="212611194" sldId="442"/>
-            <ac:spMk id="10" creationId="{D58648B5-CDB8-E3D4-79AF-6F7938709C3B}"/>
-          </ac:spMkLst>
-        </pc:spChg>
-      </pc:sldChg>
-      <pc:sldChg chg="add del replId">
-        <pc:chgData name="宏傑 楊" userId="ee57404c450d34c3" providerId="LiveId" clId="{C566A467-C6D7-4AF8-8C72-E0B89F2E9DDD}" dt="2026-07-01T07:28:05.679" v="2684" actId="47"/>
-        <pc:sldMkLst>
-          <pc:docMk/>
-          <pc:sldMk cId="2754992576" sldId="442"/>
-        </pc:sldMkLst>
       </pc:sldChg>
       <pc:sldChg chg="addSp delSp modSp add mod modNotesTx">
         <pc:chgData name="宏傑 楊" userId="ee57404c450d34c3" providerId="LiveId" clId="{C566A467-C6D7-4AF8-8C72-E0B89F2E9DDD}" dt="2026-07-01T12:45:03.697" v="3352" actId="20577"/>
@@ -666,14 +542,6 @@
           <pc:docMk/>
           <pc:sldMk cId="942896927" sldId="443"/>
         </pc:sldMkLst>
-        <pc:spChg chg="del mod">
-          <ac:chgData name="宏傑 楊" userId="ee57404c450d34c3" providerId="LiveId" clId="{C566A467-C6D7-4AF8-8C72-E0B89F2E9DDD}" dt="2026-07-01T08:47:36.115" v="3191" actId="478"/>
-          <ac:spMkLst>
-            <pc:docMk/>
-            <pc:sldMk cId="942896927" sldId="443"/>
-            <ac:spMk id="2" creationId="{8BE7DE3F-88CC-567E-5E1F-AA54A56705A4}"/>
-          </ac:spMkLst>
-        </pc:spChg>
         <pc:spChg chg="mod">
           <ac:chgData name="宏傑 楊" userId="ee57404c450d34c3" providerId="LiveId" clId="{C566A467-C6D7-4AF8-8C72-E0B89F2E9DDD}" dt="2026-07-01T08:40:21.927" v="3133"/>
           <ac:spMkLst>
@@ -700,41 +568,17 @@
         </pc:spChg>
       </pc:sldChg>
       <pc:sldChg chg="addSp delSp modSp add mod modNotesTx">
-        <pc:chgData name="宏傑 楊" userId="ee57404c450d34c3" providerId="LiveId" clId="{C566A467-C6D7-4AF8-8C72-E0B89F2E9DDD}" dt="2026-07-01T12:45:28.947" v="3394" actId="20577"/>
+        <pc:chgData name="宏傑 楊" userId="ee57404c450d34c3" providerId="LiveId" clId="{C566A467-C6D7-4AF8-8C72-E0B89F2E9DDD}" dt="2026-07-03T02:30:39.338" v="3466" actId="20577"/>
         <pc:sldMkLst>
           <pc:docMk/>
           <pc:sldMk cId="804704890" sldId="444"/>
         </pc:sldMkLst>
-        <pc:spChg chg="del mod">
-          <ac:chgData name="宏傑 楊" userId="ee57404c450d34c3" providerId="LiveId" clId="{C566A467-C6D7-4AF8-8C72-E0B89F2E9DDD}" dt="2026-07-01T08:47:43.399" v="3196" actId="478"/>
-          <ac:spMkLst>
-            <pc:docMk/>
-            <pc:sldMk cId="804704890" sldId="444"/>
-            <ac:spMk id="2" creationId="{145CEDF3-B2C2-3249-C613-6DDE80C76041}"/>
-          </ac:spMkLst>
-        </pc:spChg>
         <pc:spChg chg="mod">
           <ac:chgData name="宏傑 楊" userId="ee57404c450d34c3" providerId="LiveId" clId="{C566A467-C6D7-4AF8-8C72-E0B89F2E9DDD}" dt="2026-07-01T07:53:09.210" v="2948" actId="20577"/>
           <ac:spMkLst>
             <pc:docMk/>
             <pc:sldMk cId="804704890" sldId="444"/>
             <ac:spMk id="3" creationId="{45E06BF5-D69B-1301-0949-14BBBFB4BCE6}"/>
-          </ac:spMkLst>
-        </pc:spChg>
-        <pc:spChg chg="del">
-          <ac:chgData name="宏傑 楊" userId="ee57404c450d34c3" providerId="LiveId" clId="{C566A467-C6D7-4AF8-8C72-E0B89F2E9DDD}" dt="2026-07-01T07:37:09.387" v="2799" actId="478"/>
-          <ac:spMkLst>
-            <pc:docMk/>
-            <pc:sldMk cId="804704890" sldId="444"/>
-            <ac:spMk id="6" creationId="{24C3D8E8-AC62-CD9F-FC2B-BD8FCAD0215F}"/>
-          </ac:spMkLst>
-        </pc:spChg>
-        <pc:spChg chg="add del">
-          <ac:chgData name="宏傑 楊" userId="ee57404c450d34c3" providerId="LiveId" clId="{C566A467-C6D7-4AF8-8C72-E0B89F2E9DDD}" dt="2026-07-01T07:37:08.278" v="2798" actId="22"/>
-          <ac:spMkLst>
-            <pc:docMk/>
-            <pc:sldMk cId="804704890" sldId="444"/>
-            <ac:spMk id="7" creationId="{930A98A7-AAE8-559C-DA0A-FEF346E7FF65}"/>
           </ac:spMkLst>
         </pc:spChg>
         <pc:spChg chg="add">
@@ -6774,7 +6618,7 @@
           <a:p>
             <a:fld id="{2385926D-8BBA-4C74-8368-2D9ACE9667B6}" type="datetimeFigureOut">
               <a:rPr lang="zh-TW" altLang="en-US" smtClean="0"/>
-              <a:t>2026/7/1</a:t>
+              <a:t>2026/7/3</a:t>
             </a:fld>
             <a:endParaRPr lang="zh-TW" altLang="en-US"/>
           </a:p>
@@ -7307,7 +7151,7 @@
             </a:pPr>
             <a:r>
               <a:rPr lang="zh-TW" altLang="en-US" dirty="0"/>
-              <a:t>主要由兩個蟻群所組成</a:t>
+              <a:t>由兩個蟻群所組成</a:t>
             </a:r>
             <a:endParaRPr lang="en-US" altLang="zh-TW" dirty="0"/>
           </a:p>
@@ -7794,7 +7638,7 @@
             </a:r>
             <a:r>
               <a:rPr lang="zh-TW" altLang="zh-TW" dirty="0"/>
-              <a:t>將依序說明各模組之功能與流程</a:t>
+              <a:t>將依序說明各模組之功能</a:t>
             </a:r>
             <a:endParaRPr lang="en-US" altLang="zh-TW" dirty="0"/>
           </a:p>
@@ -10236,78 +10080,6 @@
               <a:tabLst/>
               <a:defRPr/>
             </a:pPr>
-            <a:r>
-              <a:rPr lang="zh-TW" altLang="zh-TW" dirty="0"/>
-              <a:t>為驗證各項評估指標的改善是否具有顯著性</a:t>
-            </a:r>
-            <a:endParaRPr lang="en-US" altLang="zh-TW" dirty="0"/>
-          </a:p>
-          <a:p>
-            <a:pPr marL="0" marR="0" lvl="0" indent="0" algn="l" defTabSz="914400" rtl="0" eaLnBrk="1" fontAlgn="auto" latinLnBrk="0" hangingPunct="1">
-              <a:lnSpc>
-                <a:spcPct val="100000"/>
-              </a:lnSpc>
-              <a:spcBef>
-                <a:spcPts val="0"/>
-              </a:spcBef>
-              <a:spcAft>
-                <a:spcPts val="0"/>
-              </a:spcAft>
-              <a:buClrTx/>
-              <a:buSzTx/>
-              <a:buFontTx/>
-              <a:buNone/>
-              <a:tabLst/>
-              <a:defRPr/>
-            </a:pPr>
-            <a:r>
-              <a:rPr lang="zh-TW" altLang="en-US" dirty="0"/>
-              <a:t>本研究進一步針對各項指標進行統計分析</a:t>
-            </a:r>
-            <a:endParaRPr lang="en-US" altLang="zh-TW" dirty="0"/>
-          </a:p>
-          <a:p>
-            <a:pPr marL="0" marR="0" lvl="0" indent="0" algn="l" defTabSz="914400" rtl="0" eaLnBrk="1" fontAlgn="auto" latinLnBrk="0" hangingPunct="1">
-              <a:lnSpc>
-                <a:spcPct val="100000"/>
-              </a:lnSpc>
-              <a:spcBef>
-                <a:spcPts val="0"/>
-              </a:spcBef>
-              <a:spcAft>
-                <a:spcPts val="0"/>
-              </a:spcAft>
-              <a:buClrTx/>
-              <a:buSzTx/>
-              <a:buFontTx/>
-              <a:buNone/>
-              <a:tabLst/>
-              <a:defRPr/>
-            </a:pPr>
-            <a:r>
-              <a:rPr lang="zh-TW" altLang="zh-TW" dirty="0"/>
-              <a:t>以確認其是否具有顯著差異</a:t>
-            </a:r>
-            <a:endParaRPr lang="en-US" altLang="zh-TW" dirty="0"/>
-          </a:p>
-          <a:p>
-            <a:pPr marL="0" marR="0" lvl="0" indent="0" algn="l" defTabSz="914400" rtl="0" eaLnBrk="1" fontAlgn="auto" latinLnBrk="0" hangingPunct="1">
-              <a:lnSpc>
-                <a:spcPct val="100000"/>
-              </a:lnSpc>
-              <a:spcBef>
-                <a:spcPts val="0"/>
-              </a:spcBef>
-              <a:spcAft>
-                <a:spcPts val="0"/>
-              </a:spcAft>
-              <a:buClrTx/>
-              <a:buSzTx/>
-              <a:buFontTx/>
-              <a:buNone/>
-              <a:tabLst/>
-              <a:defRPr/>
-            </a:pPr>
             <a:endParaRPr lang="en-US" altLang="zh-TW" dirty="0"/>
           </a:p>
           <a:p>
@@ -10455,24 +10227,9 @@
             </a:pPr>
             <a:r>
               <a:rPr lang="zh-TW" altLang="zh-TW" dirty="0"/>
-              <a:t>本研究</a:t>
-            </a:r>
-            <a:r>
-              <a:rPr lang="zh-TW" altLang="en-US" dirty="0"/>
-              <a:t>使用</a:t>
-            </a:r>
-            <a:r>
-              <a:rPr lang="en-US" altLang="zh-TW" b="0" dirty="0"/>
-              <a:t>Wilcoxon Signed</a:t>
-            </a:r>
-            <a:r>
-              <a:rPr lang="zh-TW" altLang="en-US" b="0" dirty="0"/>
-              <a:t> </a:t>
-            </a:r>
-            <a:r>
-              <a:rPr lang="en-US" altLang="zh-TW" b="0" dirty="0"/>
-              <a:t>Rank Test</a:t>
-            </a:r>
+              <a:t>為驗證各項評估指標的改善是否具有顯著性</a:t>
+            </a:r>
+            <a:endParaRPr lang="en-US" altLang="zh-TW" dirty="0"/>
           </a:p>
           <a:p>
             <a:pPr marL="0" marR="0" lvl="0" indent="0" algn="l" defTabSz="914400" rtl="0" eaLnBrk="1" fontAlgn="auto" latinLnBrk="0" hangingPunct="1">
@@ -10494,11 +10251,7 @@
             </a:pPr>
             <a:r>
               <a:rPr lang="zh-TW" altLang="en-US" dirty="0"/>
-              <a:t>並</a:t>
-            </a:r>
-            <a:r>
-              <a:rPr lang="zh-TW" altLang="zh-TW" dirty="0"/>
-              <a:t>將顯著水準設為 0.05</a:t>
+              <a:t>本研究進一步針對各項指標進行統計分析</a:t>
             </a:r>
             <a:endParaRPr lang="en-US" altLang="zh-TW" dirty="0"/>
           </a:p>
@@ -10521,8 +10274,8 @@
               <a:defRPr/>
             </a:pPr>
             <a:r>
-              <a:rPr lang="zh-TW" altLang="en-US" dirty="0"/>
-              <a:t>比較本研究所提出之方法與基準方法及物流公司人工規劃的結果得到的指標確認其是否顯著差異</a:t>
+              <a:rPr lang="zh-TW" altLang="zh-TW" dirty="0"/>
+              <a:t>以確認其是否具有顯著差異</a:t>
             </a:r>
             <a:endParaRPr lang="en-US" altLang="zh-TW" dirty="0"/>
           </a:p>
@@ -10566,17 +10319,24 @@
             </a:pPr>
             <a:r>
               <a:rPr lang="zh-TW" altLang="zh-TW" dirty="0"/>
-              <a:t>結果顯示</a:t>
+              <a:t>本研究</a:t>
             </a:r>
             <a:r>
               <a:rPr lang="zh-TW" altLang="en-US" dirty="0"/>
-              <a:t>本研究所提出的方法相比於兩種方法的結果</a:t>
-            </a:r>
-            <a:r>
-              <a:rPr lang="zh-TW" altLang="zh-TW" dirty="0"/>
-              <a:t>在各項評估指標皆具有顯著改善</a:t>
-            </a:r>
-            <a:endParaRPr lang="en-US" altLang="zh-TW" dirty="0"/>
+              <a:t>使用</a:t>
+            </a:r>
+            <a:r>
+              <a:rPr lang="en-US" altLang="zh-TW" b="0" dirty="0"/>
+              <a:t>Wilcoxon Signed</a:t>
+            </a:r>
+            <a:r>
+              <a:rPr lang="zh-TW" altLang="en-US" b="0" dirty="0"/>
+              <a:t> </a:t>
+            </a:r>
+            <a:r>
+              <a:rPr lang="en-US" altLang="zh-TW" b="0" dirty="0"/>
+              <a:t>Rank Test</a:t>
+            </a:r>
           </a:p>
           <a:p>
             <a:pPr marL="0" marR="0" lvl="0" indent="0" algn="l" defTabSz="914400" rtl="0" eaLnBrk="1" fontAlgn="auto" latinLnBrk="0" hangingPunct="1">
@@ -10598,8 +10358,108 @@
             </a:pPr>
             <a:r>
               <a:rPr lang="zh-TW" altLang="en-US" dirty="0"/>
+              <a:t>並</a:t>
+            </a:r>
+            <a:r>
+              <a:rPr lang="zh-TW" altLang="zh-TW" dirty="0"/>
+              <a:t>將顯著水準設為 0.05</a:t>
+            </a:r>
+            <a:endParaRPr lang="en-US" altLang="zh-TW" dirty="0"/>
+          </a:p>
+          <a:p>
+            <a:pPr marL="0" marR="0" lvl="0" indent="0" algn="l" defTabSz="914400" rtl="0" eaLnBrk="1" fontAlgn="auto" latinLnBrk="0" hangingPunct="1">
+              <a:lnSpc>
+                <a:spcPct val="100000"/>
+              </a:lnSpc>
+              <a:spcBef>
+                <a:spcPts val="0"/>
+              </a:spcBef>
+              <a:spcAft>
+                <a:spcPts val="0"/>
+              </a:spcAft>
+              <a:buClrTx/>
+              <a:buSzTx/>
+              <a:buFontTx/>
+              <a:buNone/>
+              <a:tabLst/>
+              <a:defRPr/>
+            </a:pPr>
+            <a:endParaRPr lang="en-US" altLang="zh-TW" dirty="0"/>
+          </a:p>
+          <a:p>
+            <a:pPr marL="0" marR="0" lvl="0" indent="0" algn="l" defTabSz="914400" rtl="0" eaLnBrk="1" fontAlgn="auto" latinLnBrk="0" hangingPunct="1">
+              <a:lnSpc>
+                <a:spcPct val="100000"/>
+              </a:lnSpc>
+              <a:spcBef>
+                <a:spcPts val="0"/>
+              </a:spcBef>
+              <a:spcAft>
+                <a:spcPts val="0"/>
+              </a:spcAft>
+              <a:buClrTx/>
+              <a:buSzTx/>
+              <a:buFontTx/>
+              <a:buNone/>
+              <a:tabLst/>
+              <a:defRPr/>
+            </a:pPr>
+            <a:r>
+              <a:rPr lang="zh-TW" altLang="zh-TW" dirty="0"/>
+              <a:t>結果顯示</a:t>
+            </a:r>
+            <a:r>
+              <a:rPr lang="zh-TW" altLang="en-US" dirty="0"/>
+              <a:t>本研究所提出的方法相比於兩種方法的結果</a:t>
+            </a:r>
+            <a:r>
+              <a:rPr lang="zh-TW" altLang="zh-TW" dirty="0"/>
+              <a:t>在各項評估指標皆具有顯著改善</a:t>
+            </a:r>
+            <a:endParaRPr lang="en-US" altLang="zh-TW" dirty="0"/>
+          </a:p>
+          <a:p>
+            <a:pPr marL="0" marR="0" lvl="0" indent="0" algn="l" defTabSz="914400" rtl="0" eaLnBrk="1" fontAlgn="auto" latinLnBrk="0" hangingPunct="1">
+              <a:lnSpc>
+                <a:spcPct val="100000"/>
+              </a:lnSpc>
+              <a:spcBef>
+                <a:spcPts val="0"/>
+              </a:spcBef>
+              <a:spcAft>
+                <a:spcPts val="0"/>
+              </a:spcAft>
+              <a:buClrTx/>
+              <a:buSzTx/>
+              <a:buFontTx/>
+              <a:buNone/>
+              <a:tabLst/>
+              <a:defRPr/>
+            </a:pPr>
+            <a:r>
+              <a:rPr lang="zh-TW" altLang="en-US" dirty="0"/>
               <a:t>顯示本研究方法皆能有效提升整體的配送規劃結果</a:t>
             </a:r>
+            <a:endParaRPr lang="en-US" altLang="zh-TW" dirty="0"/>
+          </a:p>
+          <a:p>
+            <a:pPr marL="0" marR="0" lvl="0" indent="0" algn="l" defTabSz="914400" rtl="0" eaLnBrk="1" fontAlgn="auto" latinLnBrk="0" hangingPunct="1">
+              <a:lnSpc>
+                <a:spcPct val="100000"/>
+              </a:lnSpc>
+              <a:spcBef>
+                <a:spcPts val="0"/>
+              </a:spcBef>
+              <a:spcAft>
+                <a:spcPts val="0"/>
+              </a:spcAft>
+              <a:buClrTx/>
+              <a:buSzTx/>
+              <a:buFontTx/>
+              <a:buNone/>
+              <a:tabLst/>
+              <a:defRPr/>
+            </a:pPr>
             <a:endParaRPr lang="en-US" altLang="zh-TW" dirty="0"/>
           </a:p>
           <a:p>
@@ -11047,11 +10907,11 @@
             </a:r>
             <a:r>
               <a:rPr lang="zh-TW" altLang="zh-TW" dirty="0"/>
-              <a:t>實務資料中，能有效提升配送效率，並降低</a:t>
+              <a:t>實務資料中，能有效提升</a:t>
             </a:r>
             <a:r>
               <a:rPr lang="zh-TW" altLang="en-US" dirty="0"/>
-              <a:t>整體配送成本</a:t>
+              <a:t>整體配送規劃結果</a:t>
             </a:r>
             <a:endParaRPr lang="en-US" altLang="zh-TW" dirty="0"/>
           </a:p>
@@ -12356,43 +12216,6 @@
           <a:p>
             <a:endParaRPr lang="en-US" altLang="zh-TW" dirty="0"/>
           </a:p>
-          <a:p>
-            <a:r>
-              <a:rPr lang="zh-TW" altLang="en-US" dirty="0"/>
-              <a:t>並且本研究將該問題分成分</a:t>
-            </a:r>
-            <a:r>
-              <a:rPr lang="en-US" altLang="zh-TW" dirty="0"/>
-              <a:t>3</a:t>
-            </a:r>
-            <a:r>
-              <a:rPr lang="zh-TW" altLang="en-US" dirty="0"/>
-              <a:t>個子問題</a:t>
-            </a:r>
-            <a:endParaRPr lang="en-US" altLang="zh-TW" dirty="0"/>
-          </a:p>
-          <a:p>
-            <a:r>
-              <a:rPr lang="zh-TW" altLang="zh-TW" dirty="0"/>
-              <a:t>針對不同子問題特性，</a:t>
-            </a:r>
-            <a:r>
-              <a:rPr lang="zh-TW" altLang="en-US" dirty="0"/>
-              <a:t>使用</a:t>
-            </a:r>
-            <a:r>
-              <a:rPr lang="zh-TW" altLang="zh-TW" dirty="0"/>
-              <a:t>相對應之最佳化</a:t>
-            </a:r>
-            <a:r>
-              <a:rPr lang="zh-TW" altLang="en-US" dirty="0"/>
-              <a:t>方法</a:t>
-            </a:r>
-            <a:endParaRPr lang="en-US" altLang="zh-TW" dirty="0"/>
-          </a:p>
-          <a:p>
-            <a:endParaRPr lang="en-US" altLang="zh-TW" dirty="0"/>
-          </a:p>
         </p:txBody>
       </p:sp>
       <p:sp>
@@ -12501,6 +12324,43 @@
           <a:p>
             <a:r>
               <a:rPr lang="zh-TW" altLang="en-US" dirty="0"/>
+              <a:t>並且本研究將該問題分成分</a:t>
+            </a:r>
+            <a:r>
+              <a:rPr lang="en-US" altLang="zh-TW" dirty="0"/>
+              <a:t>3</a:t>
+            </a:r>
+            <a:r>
+              <a:rPr lang="zh-TW" altLang="en-US" dirty="0"/>
+              <a:t>個子問題</a:t>
+            </a:r>
+            <a:endParaRPr lang="en-US" altLang="zh-TW" dirty="0"/>
+          </a:p>
+          <a:p>
+            <a:r>
+              <a:rPr lang="zh-TW" altLang="zh-TW" dirty="0"/>
+              <a:t>針對不同子問題特性，</a:t>
+            </a:r>
+            <a:r>
+              <a:rPr lang="zh-TW" altLang="en-US" dirty="0"/>
+              <a:t>使用</a:t>
+            </a:r>
+            <a:r>
+              <a:rPr lang="zh-TW" altLang="zh-TW" dirty="0"/>
+              <a:t>相對應之最佳化</a:t>
+            </a:r>
+            <a:r>
+              <a:rPr lang="zh-TW" altLang="en-US" dirty="0"/>
+              <a:t>方法</a:t>
+            </a:r>
+            <a:endParaRPr lang="en-US" altLang="zh-TW" dirty="0"/>
+          </a:p>
+          <a:p>
+            <a:endParaRPr lang="en-US" altLang="zh-TW" dirty="0"/>
+          </a:p>
+          <a:p>
+            <a:r>
+              <a:rPr lang="zh-TW" altLang="en-US" dirty="0"/>
               <a:t>合作式</a:t>
             </a:r>
             <a:r>
@@ -12527,8 +12387,12 @@
           </a:p>
           <a:p>
             <a:r>
+              <a:rPr lang="zh-TW" altLang="en-US" dirty="0"/>
+              <a:t>該方法</a:t>
+            </a:r>
+            <a:r>
               <a:rPr lang="zh-TW" altLang="zh-TW" dirty="0"/>
-              <a:t>其核心概念是將原始問題拆解為多個較小的子問題</a:t>
+              <a:t>是將原始問題拆解為多個較小的子問題</a:t>
             </a:r>
             <a:endParaRPr lang="en-US" altLang="zh-TW" dirty="0"/>
           </a:p>
@@ -12995,7 +12859,7 @@
           <a:p>
             <a:fld id="{4615597C-F572-4A2F-8DB3-4E70DD865481}" type="datetime1">
               <a:rPr lang="zh-TW" altLang="en-US" smtClean="0"/>
-              <a:t>2026/7/1</a:t>
+              <a:t>2026/7/3</a:t>
             </a:fld>
             <a:endParaRPr lang="zh-TW" altLang="en-US"/>
           </a:p>
@@ -13203,7 +13067,7 @@
           <a:p>
             <a:fld id="{511B4937-A29C-4193-9DD1-4AB39B0FC9A5}" type="datetime1">
               <a:rPr lang="zh-TW" altLang="en-US" smtClean="0"/>
-              <a:t>2026/7/1</a:t>
+              <a:t>2026/7/3</a:t>
             </a:fld>
             <a:endParaRPr lang="zh-TW" altLang="en-US"/>
           </a:p>
@@ -13461,7 +13325,7 @@
           <a:p>
             <a:fld id="{4ABB3EA8-8FA6-47FB-B4CB-5B3095828625}" type="datetime1">
               <a:rPr lang="zh-TW" altLang="en-US" smtClean="0"/>
-              <a:t>2026/7/1</a:t>
+              <a:t>2026/7/3</a:t>
             </a:fld>
             <a:endParaRPr lang="zh-TW" altLang="en-US"/>
           </a:p>
@@ -13646,7 +13510,7 @@
           <a:p>
             <a:fld id="{37A0302E-DE4D-4787-9FB6-0B2A2A238E02}" type="datetime1">
               <a:rPr lang="zh-TW" altLang="en-US" smtClean="0"/>
-              <a:t>2026/7/1</a:t>
+              <a:t>2026/7/3</a:t>
             </a:fld>
             <a:endParaRPr lang="zh-TW" altLang="en-US"/>
           </a:p>
@@ -13997,7 +13861,7 @@
           <a:p>
             <a:fld id="{305B98BF-7504-47B1-8CFB-9D9962CBFE76}" type="datetime1">
               <a:rPr lang="zh-TW" altLang="en-US" smtClean="0"/>
-              <a:t>2026/7/1</a:t>
+              <a:t>2026/7/3</a:t>
             </a:fld>
             <a:endParaRPr lang="zh-TW" altLang="en-US"/>
           </a:p>
@@ -14290,7 +14154,7 @@
           <a:p>
             <a:fld id="{3294B217-F04C-499F-B3C3-2495ADA884A1}" type="datetime1">
               <a:rPr lang="zh-TW" altLang="en-US" smtClean="0"/>
-              <a:t>2026/7/1</a:t>
+              <a:t>2026/7/3</a:t>
             </a:fld>
             <a:endParaRPr lang="zh-TW" altLang="en-US"/>
           </a:p>
@@ -14669,7 +14533,7 @@
           <a:p>
             <a:fld id="{69589430-20CC-4CB6-8099-6D6F8AD9126B}" type="datetime1">
               <a:rPr lang="zh-TW" altLang="en-US" smtClean="0"/>
-              <a:t>2026/7/1</a:t>
+              <a:t>2026/7/3</a:t>
             </a:fld>
             <a:endParaRPr lang="zh-TW" altLang="en-US"/>
           </a:p>
@@ -14787,7 +14651,7 @@
           <a:p>
             <a:fld id="{0B64F23A-ADA9-4B81-BA25-B90A125A7E29}" type="datetime1">
               <a:rPr lang="zh-TW" altLang="en-US" smtClean="0"/>
-              <a:t>2026/7/1</a:t>
+              <a:t>2026/7/3</a:t>
             </a:fld>
             <a:endParaRPr lang="zh-TW" altLang="en-US"/>
           </a:p>
@@ -14960,7 +14824,7 @@
           <a:p>
             <a:fld id="{873358DE-BAB7-43C6-B230-87048C96B64C}" type="datetime1">
               <a:rPr lang="zh-TW" altLang="en-US" smtClean="0"/>
-              <a:t>2026/7/1</a:t>
+              <a:t>2026/7/3</a:t>
             </a:fld>
             <a:endParaRPr lang="zh-TW" altLang="en-US"/>
           </a:p>
@@ -15316,7 +15180,7 @@
           <a:p>
             <a:fld id="{6B69258C-861B-4A67-93B0-E5B8B2157AFE}" type="datetime1">
               <a:rPr lang="zh-TW" altLang="en-US" smtClean="0"/>
-              <a:t>2026/7/1</a:t>
+              <a:t>2026/7/3</a:t>
             </a:fld>
             <a:endParaRPr lang="zh-TW" altLang="en-US"/>
           </a:p>
@@ -15696,7 +15560,7 @@
           <a:p>
             <a:fld id="{6B69258C-861B-4A67-93B0-E5B8B2157AFE}" type="datetime1">
               <a:rPr lang="zh-TW" altLang="en-US" smtClean="0"/>
-              <a:t>2026/7/1</a:t>
+              <a:t>2026/7/3</a:t>
             </a:fld>
             <a:endParaRPr lang="zh-TW" altLang="en-US"/>
           </a:p>
@@ -16000,7 +15864,7 @@
           <a:p>
             <a:fld id="{6B69258C-861B-4A67-93B0-E5B8B2157AFE}" type="datetime1">
               <a:rPr lang="zh-TW" altLang="en-US" smtClean="0"/>
-              <a:t>2026/7/1</a:t>
+              <a:t>2026/7/3</a:t>
             </a:fld>
             <a:endParaRPr lang="zh-TW" altLang="en-US"/>
           </a:p>
@@ -20798,8 +20662,8 @@
           </a:p>
         </p:txBody>
       </p:sp>
-      <mc:AlternateContent xmlns:mc="http://schemas.openxmlformats.org/markup-compatibility/2006">
-        <mc:Choice xmlns:a14="http://schemas.microsoft.com/office/drawing/2010/main" Requires="a14">
+      <mc:AlternateContent xmlns:mc="http://schemas.openxmlformats.org/markup-compatibility/2006" xmlns:a14="http://schemas.microsoft.com/office/drawing/2010/main">
+        <mc:Choice Requires="a14">
           <p:graphicFrame>
             <p:nvGraphicFramePr>
               <p:cNvPr id="3" name="內容版面配置區 4">
@@ -23885,7 +23749,7 @@
             </a:graphic>
           </p:graphicFrame>
         </mc:Choice>
-        <mc:Fallback>
+        <mc:Fallback xmlns="">
           <p:graphicFrame>
             <p:nvGraphicFramePr>
               <p:cNvPr id="3" name="內容版面配置區 4">
